--- a/media/exports/reports/2026-02/overtime.pptx
+++ b/media/exports/reports/2026-02/overtime.pptx
@@ -223,55 +223,55 @@
                 <c:formatCode>0.0"%";[Red](0.0"%")</c:formatCode>
                 <c:ptCount val="17"/>
                 <c:pt idx="0">
-                  <c:v>1.5</c:v>
+                  <c:v>1.6</c:v>
                 </c:pt>
                 <c:pt idx="1">
-                  <c:v>1.3</c:v>
+                  <c:v>2.7</c:v>
                 </c:pt>
                 <c:pt idx="2">
-                  <c:v>1.9</c:v>
+                  <c:v>2.2</c:v>
                 </c:pt>
                 <c:pt idx="3">
-                  <c:v>2.3</c:v>
+                  <c:v>3.0</c:v>
                 </c:pt>
                 <c:pt idx="4">
-                  <c:v>2.8</c:v>
+                  <c:v>4.6</c:v>
                 </c:pt>
                 <c:pt idx="5">
-                  <c:v>2.4</c:v>
+                  <c:v>4.4</c:v>
                 </c:pt>
                 <c:pt idx="6">
                   <c:v>3.6</c:v>
                 </c:pt>
                 <c:pt idx="7">
-                  <c:v>2.6</c:v>
+                  <c:v>3.7</c:v>
                 </c:pt>
                 <c:pt idx="8">
                   <c:v>2.8</c:v>
                 </c:pt>
                 <c:pt idx="9">
-                  <c:v>2.4</c:v>
+                  <c:v>3.3</c:v>
                 </c:pt>
                 <c:pt idx="10">
-                  <c:v>4.6</c:v>
+                  <c:v>3.3</c:v>
                 </c:pt>
                 <c:pt idx="11">
-                  <c:v>3.0</c:v>
+                  <c:v>3.7</c:v>
                 </c:pt>
                 <c:pt idx="12">
-                  <c:v>4.0</c:v>
+                  <c:v>3.9</c:v>
                 </c:pt>
                 <c:pt idx="13">
-                  <c:v>3.9</c:v>
+                  <c:v>3.8</c:v>
                 </c:pt>
                 <c:pt idx="14">
-                  <c:v>3.5</c:v>
+                  <c:v>7.7</c:v>
                 </c:pt>
                 <c:pt idx="15">
-                  <c:v>3.8</c:v>
+                  <c:v>3.1</c:v>
                 </c:pt>
                 <c:pt idx="16">
-                  <c:v>5.8</c:v>
+                  <c:v>4.2</c:v>
                 </c:pt>
               </c:numCache>
             </c:numRef>
@@ -320,7 +320,7 @@
         <c:axId val="-2100718248"/>
         <c:scaling>
           <c:orientation val="minMax"/>
-          <c:max val="8.0"/>
+          <c:max val="10.0"/>
           <c:min val="0.0"/>
         </c:scaling>
         <c:delete val="0"/>
@@ -458,10 +458,10 @@
                   <c:v>Short-staffed</c:v>
                 </c:pt>
                 <c:pt idx="2">
-                  <c:v>Installation ran over</c:v>
+                  <c:v>After-hours call-out</c:v>
                 </c:pt>
                 <c:pt idx="3">
-                  <c:v>After-hours call-out</c:v>
+                  <c:v>Installation ran over</c:v>
                 </c:pt>
               </c:strCache>
             </c:strRef>
@@ -473,16 +473,16 @@
                 <c:formatCode>#,##0;[Red](#,##0)</c:formatCode>
                 <c:ptCount val="4"/>
                 <c:pt idx="0">
-                  <c:v>4.0</c:v>
+                  <c:v>5.5</c:v>
                 </c:pt>
                 <c:pt idx="1">
-                  <c:v>7.0</c:v>
+                  <c:v>6.0</c:v>
                 </c:pt>
                 <c:pt idx="2">
-                  <c:v>22.0</c:v>
+                  <c:v>14.5</c:v>
                 </c:pt>
                 <c:pt idx="3">
-                  <c:v>26.0</c:v>
+                  <c:v>17.5</c:v>
                 </c:pt>
               </c:numCache>
             </c:numRef>
@@ -546,7 +546,7 @@
       <c:valAx>
         <c:axId val="-2113994440"/>
         <c:scaling>
-          <c:max val="29.9"/>
+          <c:max val="20.125"/>
           <c:min val="0.0"/>
         </c:scaling>
         <c:delete/>
@@ -674,10 +674,10 @@
               <c:strCache>
                 <c:ptCount val="7"/>
                 <c:pt idx="0">
-                  <c:v>Technician T3</c:v>
+                  <c:v>Technician T5</c:v>
                 </c:pt>
                 <c:pt idx="1">
-                  <c:v>Technician T2</c:v>
+                  <c:v>Technician T4</c:v>
                 </c:pt>
                 <c:pt idx="2">
                   <c:v>Technician T7</c:v>
@@ -686,13 +686,13 @@
                   <c:v>Technician T1</c:v>
                 </c:pt>
                 <c:pt idx="4">
-                  <c:v>Technician T5</c:v>
+                  <c:v>Technician T6</c:v>
                 </c:pt>
                 <c:pt idx="5">
-                  <c:v>Technician T4</c:v>
+                  <c:v>Technician T2</c:v>
                 </c:pt>
                 <c:pt idx="6">
-                  <c:v>Technician T6</c:v>
+                  <c:v>Technician T3</c:v>
                 </c:pt>
               </c:strCache>
             </c:strRef>
@@ -707,22 +707,22 @@
                   <c:v>2.0</c:v>
                 </c:pt>
                 <c:pt idx="1">
-                  <c:v>4.0</c:v>
+                  <c:v>2.5</c:v>
                 </c:pt>
                 <c:pt idx="2">
-                  <c:v>6.5</c:v>
+                  <c:v>3.5</c:v>
                 </c:pt>
                 <c:pt idx="3">
-                  <c:v>7.0</c:v>
+                  <c:v>6.0</c:v>
                 </c:pt>
                 <c:pt idx="4">
-                  <c:v>9.5</c:v>
+                  <c:v>6.5</c:v>
                 </c:pt>
                 <c:pt idx="5">
                   <c:v>11.5</c:v>
                 </c:pt>
                 <c:pt idx="6">
-                  <c:v>18.5</c:v>
+                  <c:v>11.5</c:v>
                 </c:pt>
               </c:numCache>
             </c:numRef>
@@ -786,7 +786,7 @@
       <c:valAx>
         <c:axId val="-2113994440"/>
         <c:scaling>
-          <c:max val="21.275"/>
+          <c:max val="13.225"/>
           <c:min val="0.0"/>
         </c:scaling>
         <c:delete/>
@@ -1283,7 +1283,7 @@
           <a:lstStyle/>
           <a:p>
             <a:r>
-              <a:t>Where is overtime creeping up, and why?. Overtime, February: 5.8%; Overtime hours, February: 59.0 h; February last year: 2.8%. Technicians worked 59.0 h of overtime in February, 5.8% of ordinary hours (target under 5.0%), against 3.8% in January. Over the last year it has gone from 2.8% to 5.8%. After-hours call-out is the main reason: 26.0 h, 44.1% of the overtime. Technician T6 carried the most (18.5 h). Above target by 8.5 h.</a:t>
+              <a:t>Where is overtime creeping up, and why?. Overtime, February: 4.2%; Overtime hours, February: 43.5 h; February last year: 4.6%. Technicians worked 43.5 h of overtime in February, 4.2% of ordinary hours (target under 5.0%), against 3.1% in January. Over the last year it has gone from 4.6% to 4.2%. Installation ran over is the main reason: 17.5 h, 40.2% of the overtime. Technician T2 carried the most (11.5 h).</a:t>
             </a:r>
           </a:p>
         </p:txBody>
@@ -4838,7 +4838,7 @@
                 </a:solidFill>
                 <a:latin typeface="Roboto"/>
               </a:rPr>
-              <a:t>Data retrieved 2pm, Tue 6 Oct 2026 · Generated 8 Oct 2026, 6:29pm · Sample data · Made with Python (python-pptx)</a:t>
+              <a:t>Data retrieved 2pm, Tue 6 Oct 2026 · Generated 8 Oct 2026, 11:41pm · Sample data · Made with Python (python-pptx)</a:t>
             </a:r>
           </a:p>
         </p:txBody>
@@ -5180,11 +5180,11 @@
             <a:r>
               <a:rPr sz="2200" b="1">
                 <a:solidFill>
-                  <a:srgbClr val="8A6D3B"/>
+                  <a:srgbClr val="2F7A5D"/>
                 </a:solidFill>
                 <a:latin typeface="Roboto"/>
               </a:rPr>
-              <a:t>5.8%</a:t>
+              <a:t>4.2%</a:t>
             </a:r>
           </a:p>
         </p:txBody>
@@ -5350,7 +5350,7 @@
                 </a:solidFill>
                 <a:latin typeface="Roboto"/>
               </a:rPr>
-              <a:t>59.0 h</a:t>
+              <a:t>43.5 h</a:t>
             </a:r>
           </a:p>
         </p:txBody>
@@ -5389,7 +5389,7 @@
                 </a:solidFill>
                 <a:latin typeface="Roboto"/>
               </a:rPr>
-              <a:t>January 39.5 h</a:t>
+              <a:t>January 31.0 h</a:t>
             </a:r>
           </a:p>
         </p:txBody>
@@ -5516,7 +5516,7 @@
                 </a:solidFill>
                 <a:latin typeface="Roboto"/>
               </a:rPr>
-              <a:t>2.8%</a:t>
+              <a:t>4.6%</a:t>
             </a:r>
           </a:p>
         </p:txBody>
@@ -5555,7 +5555,7 @@
                 </a:solidFill>
                 <a:latin typeface="Roboto"/>
               </a:rPr>
-              <a:t>28.0 h of overtime</a:t>
+              <a:t>41.5 h of overtime</a:t>
             </a:r>
           </a:p>
         </p:txBody>
@@ -5700,7 +5700,7 @@
                 </a:solidFill>
                 <a:latin typeface="Roboto"/>
               </a:rPr>
-              <a:t>Technicians worked 59.0 h of overtime in February, 5.8% of ordinary hours (target under 5.0%), against 3.8% in January. Over the last year it has gone from 2.8% to 5.8%.</a:t>
+              <a:t>Technicians worked 43.5 h of overtime in February, 4.2% of ordinary hours (target under 5.0%), against 3.1% in January. Over the last year it has gone from 4.6% to 4.2%.</a:t>
             </a:r>
           </a:p>
         </p:txBody>
@@ -5827,7 +5827,7 @@
                 </a:solidFill>
                 <a:latin typeface="Roboto"/>
               </a:rPr>
-              <a:t>After-hours call-out is the main reason: 26.0 h, 44.1% of the overtime. Technician T6 carried the most (18.5 h). Above target by 8.5 h.</a:t>
+              <a:t>Installation ran over is the main reason: 17.5 h, 40.2% of the overtime. Technician T2 carried the most (11.5 h).</a:t>
             </a:r>
           </a:p>
         </p:txBody>
@@ -5905,7 +5905,7 @@
                 </a:solidFill>
                 <a:latin typeface="Roboto"/>
               </a:rPr>
-              <a:t>Data retrieved 2pm, Tue 6 Oct 2026 · Generated 8 Oct 2026, 6:29pm · Sample data · Made with Python (python-pptx)</a:t>
+              <a:t>Data retrieved 2pm, Tue 6 Oct 2026 · Generated 8 Oct 2026, 11:41pm · Sample data · Made with Python (python-pptx)</a:t>
             </a:r>
           </a:p>
         </p:txBody>
@@ -6220,7 +6220,7 @@
                 </a:solidFill>
                 <a:latin typeface="Roboto"/>
               </a:rPr>
-              <a:t>Data retrieved 2pm, Tue 6 Oct 2026 · Generated 8 Oct 2026, 6:29pm · Sample data · Made with Python (python-pptx)</a:t>
+              <a:t>Data retrieved 2pm, Tue 6 Oct 2026 · Generated 8 Oct 2026, 11:41pm · Sample data · Made with Python (python-pptx)</a:t>
             </a:r>
           </a:p>
         </p:txBody>
@@ -6535,7 +6535,7 @@
                 </a:solidFill>
                 <a:latin typeface="Roboto"/>
               </a:rPr>
-              <a:t>Data retrieved 2pm, Tue 6 Oct 2026 · Generated 8 Oct 2026, 6:29pm · Sample data · Made with Python (python-pptx)</a:t>
+              <a:t>Data retrieved 2pm, Tue 6 Oct 2026 · Generated 8 Oct 2026, 11:41pm · Sample data · Made with Python (python-pptx)</a:t>
             </a:r>
           </a:p>
         </p:txBody>

--- a/media/exports/reports/2026-02/overtime.pptx
+++ b/media/exports/reports/2026-02/overtime.pptx
@@ -1213,7 +1213,7 @@
           <a:lstStyle/>
           <a:p>
             <a:r>
-              <a:t>Where is overtime creeping up, and why?. Sample Electrical &amp; Air Pty Ltd. Period: February 2026. Each technician's paid hours, day by day: ordinary hours and overtime, with the main reason for the overtime.</a:t>
+              <a:t>Where is overtime creeping up, and why?. Sample Electrical &amp; Air Pty Ltd. Period: February 2026. In short: Overtime was 4.2% of ordinary hours in February (target under 5.0%), up from 4.6% a year earlier. Each technician's paid hours, day by day: ordinary hours and overtime, with the main reason for the overtime.</a:t>
             </a:r>
           </a:p>
         </p:txBody>
@@ -4673,7 +4673,7 @@
                 </a:solidFill>
                 <a:latin typeface="Roboto"/>
               </a:rPr>
-              <a:t>Period: February 2026. Each technician's paid hours, day by day: ordinary hours and overtime, with the main reason for the overtime.</a:t>
+              <a:t>Period: February 2026. In short: Overtime was 4.2% of ordinary hours in February (target under 5.0%), up from 4.6% a year earlier. Each technician's paid hours, day by day: ordinary hours and overtime, with the main reason for the overtime.</a:t>
             </a:r>
           </a:p>
         </p:txBody>
@@ -4838,7 +4838,7 @@
                 </a:solidFill>
                 <a:latin typeface="Roboto"/>
               </a:rPr>
-              <a:t>Data retrieved 2pm, Tue 6 Oct 2026 · Generated 8 Oct 2026, 11:41pm · Sample data · Made with Python (python-pptx)</a:t>
+              <a:t>Data retrieved 2pm, Tue 6 Oct 2026 · Generated 10 Oct 2026, 9:55pm · Sample data · Made with Python (python-pptx)</a:t>
             </a:r>
           </a:p>
         </p:txBody>
@@ -5905,7 +5905,7 @@
                 </a:solidFill>
                 <a:latin typeface="Roboto"/>
               </a:rPr>
-              <a:t>Data retrieved 2pm, Tue 6 Oct 2026 · Generated 8 Oct 2026, 11:41pm · Sample data · Made with Python (python-pptx)</a:t>
+              <a:t>Data retrieved 2pm, Tue 6 Oct 2026 · Generated 10 Oct 2026, 9:55pm · Sample data · Made with Python (python-pptx)</a:t>
             </a:r>
           </a:p>
         </p:txBody>
@@ -6220,7 +6220,7 @@
                 </a:solidFill>
                 <a:latin typeface="Roboto"/>
               </a:rPr>
-              <a:t>Data retrieved 2pm, Tue 6 Oct 2026 · Generated 8 Oct 2026, 11:41pm · Sample data · Made with Python (python-pptx)</a:t>
+              <a:t>Data retrieved 2pm, Tue 6 Oct 2026 · Generated 10 Oct 2026, 9:55pm · Sample data · Made with Python (python-pptx)</a:t>
             </a:r>
           </a:p>
         </p:txBody>
@@ -6535,7 +6535,7 @@
                 </a:solidFill>
                 <a:latin typeface="Roboto"/>
               </a:rPr>
-              <a:t>Data retrieved 2pm, Tue 6 Oct 2026 · Generated 8 Oct 2026, 11:41pm · Sample data · Made with Python (python-pptx)</a:t>
+              <a:t>Data retrieved 2pm, Tue 6 Oct 2026 · Generated 10 Oct 2026, 9:55pm · Sample data · Made with Python (python-pptx)</a:t>
             </a:r>
           </a:p>
         </p:txBody>
